--- a/assets/pptx/catalog-563.pptx
+++ b/assets/pptx/catalog-563.pptx
@@ -3351,7 +3351,7 @@
                 <a:ea typeface="Ebrima"/>
                 <a:cs typeface="Ebrima"/>
               </a:rPr>
-              <a:t>አዝ ሥራህ ግሩምና ድንቅ ነው (3x) ጌታ ሆይ</a:t>
+              <a:t>አዝ ሥራህ ግሩምና ድንቅ ነው 3x ጌታ ሆይ</a:t>
             </a:r>
           </a:p>
           <a:p>
@@ -3369,7 +3369,7 @@
                 <a:ea typeface="Ebrima"/>
                 <a:cs typeface="Ebrima"/>
               </a:rPr>
-              <a:t>ሥራህ ግሩምና ድንቅ ነው (3x) ጌታ ሆይ</a:t>
+              <a:t>ሥራህ ግሩምና ድንቅ ነው 3x ጌታ ሆይ</a:t>
             </a:r>
           </a:p>
         </p:txBody>
@@ -3539,7 +3539,7 @@
                 <a:ea typeface="Ebrima"/>
                 <a:cs typeface="Ebrima"/>
               </a:rPr>
-              <a:t>አዝ ሥራህ ግሩምና ድንቅ ነው (3x) ጌታ ሆይ</a:t>
+              <a:t>አዝ ሥራህ ግሩምና ድንቅ ነው 3x ጌታ ሆይ</a:t>
             </a:r>
           </a:p>
           <a:p>
@@ -3557,7 +3557,7 @@
                 <a:ea typeface="Ebrima"/>
                 <a:cs typeface="Ebrima"/>
               </a:rPr>
-              <a:t>ሥራህ ግሩምና ድንቅ ነው (3x) ጌታ ሆይ</a:t>
+              <a:t>ሥራህ ግሩምና ድንቅ ነው 3x ጌታ ሆይ</a:t>
             </a:r>
           </a:p>
         </p:txBody>
@@ -3727,7 +3727,7 @@
                 <a:ea typeface="Ebrima"/>
                 <a:cs typeface="Ebrima"/>
               </a:rPr>
-              <a:t>አዝ ሥራህ ግሩምና ድንቅ ነው (3x) ጌታ ሆይ</a:t>
+              <a:t>አዝ ሥራህ ግሩምና ድንቅ ነው 3x ጌታ ሆይ</a:t>
             </a:r>
           </a:p>
           <a:p>
@@ -3745,7 +3745,7 @@
                 <a:ea typeface="Ebrima"/>
                 <a:cs typeface="Ebrima"/>
               </a:rPr>
-              <a:t>ሥራህ ግሩምና ድንቅ ነው (3x) ጌታ ሆይ</a:t>
+              <a:t>ሥራህ ግሩምና ድንቅ ነው 3x ጌታ ሆይ</a:t>
             </a:r>
           </a:p>
         </p:txBody>
@@ -3812,7 +3812,7 @@
                 <a:ea typeface="Ebrima"/>
                 <a:cs typeface="Ebrima"/>
               </a:rPr>
-              <a:t>ኢየሱስ (4x)</a:t>
+              <a:t>ኢየሱስ 4x</a:t>
             </a:r>
           </a:p>
         </p:txBody>
@@ -3897,7 +3897,7 @@
                 <a:ea typeface="Ebrima"/>
                 <a:cs typeface="Ebrima"/>
               </a:rPr>
-              <a:t>ኢየሱስ የእኛ ጌታ ሁሉንም የረታህ (4x)</a:t>
+              <a:t>ኢየሱስ የእኛ ጌታ ሁሉንም የረታህ 4x</a:t>
             </a:r>
           </a:p>
         </p:txBody>
